--- a/docs/Tripwire-Pitch.pptx
+++ b/docs/Tripwire-Pitch.pptx
@@ -119,7 +119,7 @@
   <p:extLst>
     <p:ext uri="{521415D9-36F7-43E2-AB2F-B90AF26B5E84}">
       <p14:sectionLst xmlns:p14="http://schemas.microsoft.com/office/powerpoint/2010/main">
-        <p14:section name="Why" id="{315eb16c-d7eb-2041-939a-9f20227202a8}">
+        <p14:section name="Why" id="{8f7d45eb-f73e-eb95-e212-7d168ac26e22}">
           <p14:sldIdLst>
             <p14:sldId id="256"/>
             <p14:sldId id="257"/>
@@ -129,19 +129,19 @@
             <p14:sldId id="263"/>
           </p14:sldIdLst>
         </p14:section>
-        <p14:section name="How" id="{f5d5f09b-5914-26de-0c27-f72ebb8ad762}">
+        <p14:section name="How" id="{78fd9602-ff38-9a52-811c-2d19fc6c4fcb}">
           <p14:sldIdLst>
             <p14:sldId id="260"/>
             <p14:sldId id="261"/>
           </p14:sldIdLst>
         </p14:section>
-        <p14:section name="Proof" id="{ddf4703d-e99f-c75f-2739-162bb8c6a284}">
+        <p14:section name="Proof" id="{2da5c912-80fd-1463-45f7-cd4d58cfd14b}">
           <p14:sldIdLst>
             <p14:sldId id="264"/>
             <p14:sldId id="265"/>
           </p14:sldIdLst>
         </p14:section>
-        <p14:section name="Trust and impact" id="{45a28e94-f672-2f12-933b-0a910d3b7f18}">
+        <p14:section name="Trust and impact" id="{c0d4ccba-c237-2ac2-9098-f1df5b24d7f3}">
           <p14:sldIdLst>
             <p14:sldId id="266"/>
             <p14:sldId id="267"/>
